--- a/server/test/fixtures/deck.pptx
+++ b/server/test/fixtures/deck.pptx
@@ -2,9 +2,11 @@
 <file path=ppt/presentation.xml><?xml version="1.0" encoding="utf-8"?>
 <p:presentation xmlns:p="http://schemas.openxmlformats.org/presentationml/2006/main" xmlns:r="http://schemas.openxmlformats.org/officeDocument/2006/relationships">
   <p:sldIdLst>
-    <p:sldId id="256" r:id="rId2"/>
-    <p:sldId id="257" r:id="rId3"/>
+    <p:sldId id="256" r:id="rId4"/>
+    <p:sldId id="257" r:id="rId2"/>
     <p:sldId id="258" r:id="rId1"/>
+    <p:sldId id="259" r:id="rId3"/>
+    <p:sldId id="260" r:id="rId5"/>
   </p:sldIdLst>
 </p:presentation>
 </file>
@@ -131,6 +133,55 @@
     </c:plotArea>
   </c:chart>
 </c:chartSpace>
+</file>
+
+<file path=ppt/charts/chartEx1.xml><?xml version="1.0" encoding="utf-8"?>
+<cx:chartSpace xmlns:cx="http://schemas.microsoft.com/office/drawing/2014/chartex" xmlns:a="http://schemas.openxmlformats.org/drawingml/2006/main">
+  <cx:chartData>
+    <cx:data id="0">
+      <cx:strDim type="cat">
+        <cx:f>Sheet1!$A$2:$A$3</cx:f>
+        <cx:lvl ptCount="2">
+          <cx:pt idx="0">단계1</cx:pt>
+          <cx:pt idx="1">단계2</cx:pt>
+        </cx:lvl>
+      </cx:strDim>
+      <cx:numDim type="val">
+        <cx:f>Sheet1!$B$2:$B$3</cx:f>
+        <cx:lvl ptCount="2">
+          <cx:pt idx="0">40</cx:pt>
+          <cx:pt idx="1">25</cx:pt>
+        </cx:lvl>
+      </cx:numDim>
+    </cx:data>
+  </cx:chartData>
+  <cx:chart>
+    <cx:title>
+      <cx:tx>
+        <cx:rich>
+          <a:p>
+            <a:r>
+              <a:t>깔때기 전환</a:t>
+            </a:r>
+          </a:p>
+        </cx:rich>
+      </cx:tx>
+    </cx:title>
+    <cx:plotArea>
+      <cx:plotAreaRegion>
+        <cx:series layoutId="funnel" uniqueId="{00000000-0000-0000-0000-000000000001}">
+          <cx:tx>
+            <cx:txData>
+              <cx:f>Sheet1!$B$1</cx:f>
+              <cx:v>전환</cx:v>
+            </cx:txData>
+          </cx:tx>
+          <cx:dataId val="0"/>
+        </cx:series>
+      </cx:plotAreaRegion>
+    </cx:plotArea>
+  </cx:chart>
+</cx:chartSpace>
 </file>
 
 <file path=ppt/diagrams/data1.xml><?xml version="1.0" encoding="utf-8"?>
@@ -170,6 +221,24 @@
 </file>
 
 <file path=ppt/notesSlides/notesSlide1.xml><?xml version="1.0" encoding="utf-8"?>
+<p:notes xmlns:a="http://schemas.openxmlformats.org/drawingml/2006/main" xmlns:p="http://schemas.openxmlformats.org/presentationml/2006/main">
+  <p:cSld>
+    <p:spTree>
+      <p:sp>
+        <p:txBody>
+          <a:p>
+            <a:r>
+              <a:t>지운 장의 잔해입니다</a:t>
+            </a:r>
+          </a:p>
+        </p:txBody>
+      </p:sp>
+    </p:spTree>
+  </p:cSld>
+</p:notes>
+</file>
+
+<file path=ppt/notesSlides/notesSlide4.xml><?xml version="1.0" encoding="utf-8"?>
 <p:notes xmlns:a="http://schemas.openxmlformats.org/drawingml/2006/main" xmlns:p="http://schemas.openxmlformats.org/presentationml/2006/main">
   <p:cSld>
     <p:spTree>
@@ -289,6 +358,13 @@
           </a:graphicData>
         </a:graphic>
       </p:graphicFrame>
+      <p:graphicFrame>
+        <a:graphic>
+          <a:graphicData uri="http://schemas.microsoft.com/office/drawing/2014/chartex">
+            <cx:chart xmlns:cx="http://schemas.microsoft.com/office/drawing/2014/chartex" xmlns:r="http://schemas.openxmlformats.org/officeDocument/2006/relationships" r:id="rId5"/>
+          </a:graphicData>
+        </a:graphic>
+      </p:graphicFrame>
     </p:spTree>
   </p:cSld>
 </p:sld>
@@ -306,4 +382,40 @@
     </p:spTree>
   </p:cSld>
 </p:sld>
+</file>
+
+<file path=ppt/slides/slide4.xml><?xml version="1.0" encoding="utf-8"?>
+<p:sld xmlns:a="http://schemas.openxmlformats.org/drawingml/2006/main" xmlns:p="http://schemas.openxmlformats.org/presentationml/2006/main">
+  <p:cSld>
+    <p:spTree>
+      <p:sp>
+        <p:txBody>
+          <a:p>
+            <a:r>
+              <a:t>넷째 장 관계 파일 없음</a:t>
+            </a:r>
+          </a:p>
+        </p:txBody>
+      </p:sp>
+    </p:spTree>
+  </p:cSld>
+</p:sld>
+</file>
+
+<file path=ppt/slides/slide5.xml><?xml version="1.0" encoding="utf-8"?>
+<p:sld xmlns:a="http://schemas.openxmlformats.org/drawingml/2006/main" xmlns:p="http://schemas.openxmlformats.org/presentationml/2006/main">
+  <p:cSld>
+    <p:spTree>
+      <p:sp>
+        <p:txBody>
+          <a:p>
+            <a:r>
+              <a:t>다섯째 장 노트 중복 참조</a:t>
+            </a:r>
+          </a:p>
+        </p:txBody>
+      </p:sp>
+    </p:spTree>
+  </p:cSld>
+</p:sld>
 </file>